--- a/Orca_Presentation.pptx
+++ b/Orca_Presentation.pptx
@@ -3996,8 +3996,12 @@
               <a:t>/</a:t>
             </a:r>
             <a:r>
+              <a:rPr lang="en-US" dirty="0" err="1"/>
+              <a:t>june</a:t>
+            </a:r>
+            <a:r>
               <a:rPr lang="en-US" dirty="0"/>
-              <a:t>June-in-exile</a:t>
+              <a:t>-in-exile</a:t>
             </a:r>
             <a:r>
               <a:rPr dirty="0"/>
